--- a/Clients/RGS/presentation/Technijian for ROG Services - First Meeting Deck.pptx
+++ b/Clients/RGS/presentation/Technijian for ROG Services - First Meeting Deck.pptx
@@ -952,7 +952,7 @@
           <a:p>
             <a:r>
               <a:rPr lang="en-US" dirty="0"/>
-              <a:t>Earn the right to keep talking — 20 seconds, not a history lesson. Four proof points: (1) 25+ years, since 2000 — we're not going anywhere; (2) the POD model — a named team that learns YOUR environment, not a new stranger every ticket; (3) security-first, CISSP-led, our own 24/7 SOC; (4) AI-forward — we actually build, not just resell. For a nonprofit, add the affordability note: we know the nonprofit licensing programs (TechSoup, Microsoft 365 nonprofit) and we right-size. If they're quiet, ask: "Have you worked with an outside IT provider before — what did you like or want to be different?"</a:t>
+              <a:t>Earn the right to keep talking — 20 seconds, not a history lesson. Four proof points: (1) 25+ years, since 2000 — we're not going anywhere; (2) the POD model — a named team that learns YOUR environment, not a new stranger every ticket; (3) security-first, CISSP-led, 24/7 MDR (our My Jian SIEM + CrowdStrike/Huntress MDR); (4) AI-forward — we actually build, not just resell. For a nonprofit, add the affordability note: we know the nonprofit licensing programs (TechSoup, Microsoft 365 nonprofit) and we right-size. If they're quiet, ask: "Have you worked with an outside IT provider before — what did you like or want to be different?"</a:t>
             </a:r>
             <a:endParaRPr lang="en-US" dirty="0"/>
           </a:p>
@@ -7406,7 +7406,7 @@
                 <a:ea typeface="Arial" pitchFamily="34" charset="-122"/>
                 <a:cs typeface="Arial" pitchFamily="34" charset="-120"/>
               </a:rPr>
-              <a:t>CISSP-led, with our own 24/7 Security Operations Center and CrowdStrike / Huntress-grade tooling. Security isn't an add-on line item for us — it's how we run everything.</a:t>
+              <a:t>CISSP-led, delivering 24/7 managed detection &amp; response — our My Jian SIEM correlating across CrowdStrike/Huntress MDR, with our analysts triaging. Security isn't an add-on line item for us — it's how we run everything.</a:t>
             </a:r>
             <a:endParaRPr lang="en-US" sz="1150" dirty="0"/>
           </a:p>
@@ -11701,7 +11701,7 @@
                 <a:ea typeface="Arial" pitchFamily="34" charset="-122"/>
                 <a:cs typeface="Arial" pitchFamily="34" charset="-120"/>
               </a:rPr>
-              <a:t>24/7 SOC &amp; response</a:t>
+              <a:t>24/7 MDR &amp; response</a:t>
             </a:r>
             <a:endParaRPr lang="en-US" sz="1500" dirty="0"/>
           </a:p>
